--- a/topics/課外主題_LLM推論最佳化.pptx
+++ b/topics/課外主題_LLM推論最佳化.pptx
@@ -4542,7 +4542,9 @@
       <p:bldP spid="6" grpId="0" animBg="1"/>
       <p:bldP spid="7" grpId="0" animBg="1"/>
       <p:bldP spid="8" grpId="0" animBg="1"/>
-      <p:bldP spid="9" grpId="0" animBg="1"/>
+      <p:bldGraphic spid="9" grpId="0">
+        <p:bldAsOne/>
+      </p:bldGraphic>
       <p:bldP spid="10" grpId="0" animBg="1"/>
     </p:bldLst>
   </p:timing>
@@ -5425,7 +5427,9 @@
       </p:par>
     </p:tnLst>
     <p:bldLst>
-      <p:bldP spid="5" grpId="0" animBg="1"/>
+      <p:bldGraphic spid="5" grpId="0">
+        <p:bldAsOne/>
+      </p:bldGraphic>
       <p:bldP spid="6" grpId="0" animBg="1"/>
       <p:bldP spid="7" grpId="0" animBg="1"/>
       <p:bldP spid="8" grpId="0" animBg="1"/>
@@ -8237,7 +8241,9 @@
       </p:par>
     </p:tnLst>
     <p:bldLst>
-      <p:bldP spid="5" grpId="0" animBg="1"/>
+      <p:bldGraphic spid="5" grpId="0">
+        <p:bldAsOne/>
+      </p:bldGraphic>
       <p:bldP spid="6" grpId="0" animBg="1"/>
       <p:bldP spid="7" grpId="0" animBg="1"/>
     </p:bldLst>
@@ -10664,7 +10670,9 @@
       </p:par>
     </p:tnLst>
     <p:bldLst>
-      <p:bldP spid="5" grpId="0" animBg="1"/>
+      <p:bldGraphic spid="5" grpId="0">
+        <p:bldAsOne/>
+      </p:bldGraphic>
       <p:bldP spid="6" grpId="0" animBg="1"/>
       <p:bldP spid="7" grpId="0" animBg="1"/>
       <p:bldP spid="8" grpId="0" animBg="1"/>
@@ -11517,7 +11525,9 @@
     </p:tnLst>
     <p:bldLst>
       <p:bldP spid="5" grpId="0" animBg="1"/>
-      <p:bldP spid="6" grpId="0" animBg="1"/>
+      <p:bldGraphic spid="6" grpId="0">
+        <p:bldAsOne/>
+      </p:bldGraphic>
       <p:bldP spid="7" grpId="0" animBg="1"/>
       <p:bldP spid="8" grpId="0" animBg="1"/>
     </p:bldLst>
@@ -12629,7 +12639,9 @@
       <p:bldP spid="5" grpId="0" animBg="1"/>
       <p:bldP spid="6" grpId="0" animBg="1"/>
       <p:bldP spid="7" grpId="0" animBg="1"/>
-      <p:bldP spid="8" grpId="0" animBg="1"/>
+      <p:bldGraphic spid="8" grpId="0">
+        <p:bldAsOne/>
+      </p:bldGraphic>
       <p:bldP spid="9" grpId="0" animBg="1"/>
     </p:bldLst>
   </p:timing>
